--- a/examples/ppt/transitions/transitions-basic.pptx
+++ b/examples/ppt/transitions/transitions-basic.pptx
@@ -5,12 +5,12 @@
     <p:sldMasterId xmlns:r="http://schemas.openxmlformats.org/officeDocument/2006/relationships" id="2147483648" r:id="rId1"/>
   </p:sldMasterIdLst>
   <p:sldIdLst>
-    <p:sldId id="256" r:id="R232e7398f1754612"/>
-    <p:sldId id="257" r:id="R622f0de0414b4af5"/>
-    <p:sldId id="258" r:id="R0097c15b0c6e45ed"/>
-    <p:sldId id="259" r:id="Ra8e37a4d5c0549d2"/>
-    <p:sldId id="260" r:id="R9edbed330bbe4cf9"/>
-    <p:sldId id="261" r:id="Rb71f210165e4486f"/>
+    <p:sldId id="256" r:id="R85de36f760ee41c3"/>
+    <p:sldId id="257" r:id="R855fa8e3be334f5f"/>
+    <p:sldId id="258" r:id="R08f24f985bc246aa"/>
+    <p:sldId id="259" r:id="Rac9e5f424c05470e"/>
+    <p:sldId id="260" r:id="R9bdba3a6b2684a99"/>
+    <p:sldId id="261" r:id="R3920f7f78d9a4a35"/>
   </p:sldIdLst>
   <p:sldSz cx="12192000" cy="6858000"/>
   <p:notesSz cx="6858000" cy="9144000"/>
@@ -285,7 +285,7 @@
 </file>
 
 <file path=ppt/slideMasters/slideMaster1.xml><?xml version="1.0" encoding="utf-8"?>
-<p:sldMaster xmlns:p="http://schemas.openxmlformats.org/presentationml/2006/main">
+<p:sldMaster xmlns:r="http://schemas.openxmlformats.org/officeDocument/2006/relationships" xmlns:p="http://schemas.openxmlformats.org/presentationml/2006/main">
   <p:cSld>
     <p:spTree>
       <p:nvGrpSpPr>
@@ -319,7 +319,7 @@
       <p:grpSpPr/>
       <p:sp>
         <p:nvSpPr>
-          <p:cNvPr id="10000" name="TextBox 1"/>
+          <p:cNvPr id="100000" name="TextBox 1"/>
           <p:cNvSpPr/>
           <p:nvPr/>
         </p:nvSpPr>
@@ -338,17 +338,12 @@
         <p:txBody>
           <a:bodyPr xmlns:a="http://schemas.openxmlformats.org/drawingml/2006/main"/>
           <a:lstStyle xmlns:a="http://schemas.openxmlformats.org/drawingml/2006/main"/>
-          <a:p xmlns:a="http://schemas.openxmlformats.org/drawingml/2006/main">
-            <a:r>
-              <a:rPr lang="en-US"/>
-              <a:t/>
-            </a:r>
-          </a:p>
-        </p:txBody>
-      </p:sp>
-      <p:sp>
-        <p:nvSpPr>
-          <p:cNvPr id="10001" name="TextBox 2"/>
+          <a:p xmlns:a="http://schemas.openxmlformats.org/drawingml/2006/main"/>
+        </p:txBody>
+      </p:sp>
+      <p:sp>
+        <p:nvSpPr>
+          <p:cNvPr id="100001" name="TextBox 2"/>
           <p:cNvSpPr txBox="1"/>
           <p:nvPr/>
         </p:nvSpPr>
@@ -394,7 +389,7 @@
       <p:grpSpPr/>
       <p:sp>
         <p:nvSpPr>
-          <p:cNvPr id="10002" name="TextBox 1"/>
+          <p:cNvPr id="100002" name="TextBox 1"/>
           <p:cNvSpPr/>
           <p:nvPr/>
         </p:nvSpPr>
@@ -413,17 +408,12 @@
         <p:txBody>
           <a:bodyPr xmlns:a="http://schemas.openxmlformats.org/drawingml/2006/main"/>
           <a:lstStyle xmlns:a="http://schemas.openxmlformats.org/drawingml/2006/main"/>
-          <a:p xmlns:a="http://schemas.openxmlformats.org/drawingml/2006/main">
-            <a:r>
-              <a:rPr lang="en-US"/>
-              <a:t/>
-            </a:r>
-          </a:p>
-        </p:txBody>
-      </p:sp>
-      <p:sp>
-        <p:nvSpPr>
-          <p:cNvPr id="10003" name="TextBox 2"/>
+          <a:p xmlns:a="http://schemas.openxmlformats.org/drawingml/2006/main"/>
+        </p:txBody>
+      </p:sp>
+      <p:sp>
+        <p:nvSpPr>
+          <p:cNvPr id="100003" name="TextBox 2"/>
           <p:cNvSpPr txBox="1"/>
           <p:nvPr/>
         </p:nvSpPr>
@@ -472,7 +462,7 @@
       <p:grpSpPr/>
       <p:sp>
         <p:nvSpPr>
-          <p:cNvPr id="10004" name="TextBox 1"/>
+          <p:cNvPr id="100004" name="TextBox 1"/>
           <p:cNvSpPr/>
           <p:nvPr/>
         </p:nvSpPr>
@@ -491,17 +481,12 @@
         <p:txBody>
           <a:bodyPr xmlns:a="http://schemas.openxmlformats.org/drawingml/2006/main"/>
           <a:lstStyle xmlns:a="http://schemas.openxmlformats.org/drawingml/2006/main"/>
-          <a:p xmlns:a="http://schemas.openxmlformats.org/drawingml/2006/main">
-            <a:r>
-              <a:rPr lang="en-US"/>
-              <a:t/>
-            </a:r>
-          </a:p>
-        </p:txBody>
-      </p:sp>
-      <p:sp>
-        <p:nvSpPr>
-          <p:cNvPr id="10005" name="TextBox 2"/>
+          <a:p xmlns:a="http://schemas.openxmlformats.org/drawingml/2006/main"/>
+        </p:txBody>
+      </p:sp>
+      <p:sp>
+        <p:nvSpPr>
+          <p:cNvPr id="100005" name="TextBox 2"/>
           <p:cNvSpPr txBox="1"/>
           <p:nvPr/>
         </p:nvSpPr>
@@ -550,7 +535,7 @@
       <p:grpSpPr/>
       <p:sp>
         <p:nvSpPr>
-          <p:cNvPr id="10006" name="TextBox 1"/>
+          <p:cNvPr id="100006" name="TextBox 1"/>
           <p:cNvSpPr/>
           <p:nvPr/>
         </p:nvSpPr>
@@ -569,17 +554,12 @@
         <p:txBody>
           <a:bodyPr xmlns:a="http://schemas.openxmlformats.org/drawingml/2006/main"/>
           <a:lstStyle xmlns:a="http://schemas.openxmlformats.org/drawingml/2006/main"/>
-          <a:p xmlns:a="http://schemas.openxmlformats.org/drawingml/2006/main">
-            <a:r>
-              <a:rPr lang="en-US"/>
-              <a:t/>
-            </a:r>
-          </a:p>
-        </p:txBody>
-      </p:sp>
-      <p:sp>
-        <p:nvSpPr>
-          <p:cNvPr id="10007" name="TextBox 2"/>
+          <a:p xmlns:a="http://schemas.openxmlformats.org/drawingml/2006/main"/>
+        </p:txBody>
+      </p:sp>
+      <p:sp>
+        <p:nvSpPr>
+          <p:cNvPr id="100007" name="TextBox 2"/>
           <p:cNvSpPr txBox="1"/>
           <p:nvPr/>
         </p:nvSpPr>
@@ -628,7 +608,7 @@
       <p:grpSpPr/>
       <p:sp>
         <p:nvSpPr>
-          <p:cNvPr id="10008" name="TextBox 1"/>
+          <p:cNvPr id="100008" name="TextBox 1"/>
           <p:cNvSpPr/>
           <p:nvPr/>
         </p:nvSpPr>
@@ -647,17 +627,12 @@
         <p:txBody>
           <a:bodyPr xmlns:a="http://schemas.openxmlformats.org/drawingml/2006/main"/>
           <a:lstStyle xmlns:a="http://schemas.openxmlformats.org/drawingml/2006/main"/>
-          <a:p xmlns:a="http://schemas.openxmlformats.org/drawingml/2006/main">
-            <a:r>
-              <a:rPr lang="en-US"/>
-              <a:t/>
-            </a:r>
-          </a:p>
-        </p:txBody>
-      </p:sp>
-      <p:sp>
-        <p:nvSpPr>
-          <p:cNvPr id="10009" name="TextBox 2"/>
+          <a:p xmlns:a="http://schemas.openxmlformats.org/drawingml/2006/main"/>
+        </p:txBody>
+      </p:sp>
+      <p:sp>
+        <p:nvSpPr>
+          <p:cNvPr id="100009" name="TextBox 2"/>
           <p:cNvSpPr txBox="1"/>
           <p:nvPr/>
         </p:nvSpPr>
@@ -715,7 +690,7 @@
       <p:grpSpPr/>
       <p:sp>
         <p:nvSpPr>
-          <p:cNvPr id="10010" name="TextBox 1"/>
+          <p:cNvPr id="100010" name="TextBox 1"/>
           <p:cNvSpPr/>
           <p:nvPr/>
         </p:nvSpPr>
@@ -734,17 +709,12 @@
         <p:txBody>
           <a:bodyPr xmlns:a="http://schemas.openxmlformats.org/drawingml/2006/main"/>
           <a:lstStyle xmlns:a="http://schemas.openxmlformats.org/drawingml/2006/main"/>
-          <a:p xmlns:a="http://schemas.openxmlformats.org/drawingml/2006/main">
-            <a:r>
-              <a:rPr lang="en-US"/>
-              <a:t/>
-            </a:r>
-          </a:p>
-        </p:txBody>
-      </p:sp>
-      <p:sp>
-        <p:nvSpPr>
-          <p:cNvPr id="10011" name="TextBox 2"/>
+          <a:p xmlns:a="http://schemas.openxmlformats.org/drawingml/2006/main"/>
+        </p:txBody>
+      </p:sp>
+      <p:sp>
+        <p:nvSpPr>
+          <p:cNvPr id="100011" name="TextBox 2"/>
           <p:cNvSpPr txBox="1"/>
           <p:nvPr/>
         </p:nvSpPr>
